--- a/UNIDAD 5/Actividad 5.2 Reporte de practica_Eddi Castillo_ABD_6ISCM.pptx
+++ b/UNIDAD 5/Actividad 5.2 Reporte de practica_Eddi Castillo_ABD_6ISCM.pptx
@@ -1944,7 +1944,7 @@
             </a:pPr>
             <a:fld id="{1D8BD707-D9CF-40AE-B4C6-C98DA3205C09}" type="datetimeFigureOut">
               <a:rPr lang="en-US"/>
-              <a:t>6/14/2026</a:t>
+              <a:t>6/13/2026</a:t>
             </a:fld>
             <a:endParaRPr/>
           </a:p>
@@ -2137,7 +2137,7 @@
             </a:pPr>
             <a:fld id="{1D8BD707-D9CF-40AE-B4C6-C98DA3205C09}" type="datetimeFigureOut">
               <a:rPr lang="en-US"/>
-              <a:t>6/14/2026</a:t>
+              <a:t>6/13/2026</a:t>
             </a:fld>
             <a:endParaRPr/>
           </a:p>
@@ -2370,7 +2370,7 @@
             </a:pPr>
             <a:fld id="{1D8BD707-D9CF-40AE-B4C6-C98DA3205C09}" type="datetimeFigureOut">
               <a:rPr lang="en-US"/>
-              <a:t>6/14/2026</a:t>
+              <a:t>6/13/2026</a:t>
             </a:fld>
             <a:endParaRPr/>
           </a:p>
@@ -2531,7 +2531,7 @@
             </a:pPr>
             <a:fld id="{1D8BD707-D9CF-40AE-B4C6-C98DA3205C09}" type="datetimeFigureOut">
               <a:rPr lang="en-US"/>
-              <a:t>6/14/2026</a:t>
+              <a:t>6/13/2026</a:t>
             </a:fld>
             <a:endParaRPr/>
           </a:p>
@@ -2688,7 +2688,7 @@
             </a:pPr>
             <a:fld id="{1D8BD707-D9CF-40AE-B4C6-C98DA3205C09}" type="datetimeFigureOut">
               <a:rPr lang="en-US"/>
-              <a:t>6/14/2026</a:t>
+              <a:t>6/13/2026</a:t>
             </a:fld>
             <a:endParaRPr/>
           </a:p>
@@ -2949,7 +2949,7 @@
             </a:pPr>
             <a:fld id="{1D8BD707-D9CF-40AE-B4C6-C98DA3205C09}" type="datetimeFigureOut">
               <a:rPr lang="en-US"/>
-              <a:t>6/14/2026</a:t>
+              <a:t>6/13/2026</a:t>
             </a:fld>
             <a:endParaRPr/>
           </a:p>
@@ -4461,7 +4461,7 @@
     <mc:Choice Requires="p159">
       <p:transition/>
     </mc:Choice>
-    <mc:Fallback xmlns:w="http://schemas.openxmlformats.org/wordprocessingml/2006/main" xmlns:m="http://schemas.openxmlformats.org/officeDocument/2006/math" xmlns="">
+    <mc:Fallback xmlns="" xmlns:m="http://schemas.openxmlformats.org/officeDocument/2006/math" xmlns:w="http://schemas.openxmlformats.org/wordprocessingml/2006/main">
       <p:transition advClick="1"/>
     </mc:Fallback>
   </mc:AlternateContent>
@@ -10488,7 +10488,7 @@
         <p:spPr bwMode="auto">
           <a:xfrm>
             <a:off x="5825861" y="3479905"/>
-            <a:ext cx="6636277" cy="1292662"/>
+            <a:ext cx="6636277" cy="1723549"/>
           </a:xfrm>
           <a:prstGeom prst="rect">
             <a:avLst/>
@@ -10529,8 +10529,11 @@
                 <a:effectLst/>
                 <a:latin typeface="pplxSerif"/>
               </a:rPr>
-              <a:t> con las </a:t>
-            </a:r>
+              <a:t> con las actividades correspondientes</a:t>
+            </a:r>
+          </a:p>
+          <a:p>
+            <a:pPr algn="l"/>
             <a:r>
               <a:rPr lang="es-ES" sz="2800" b="0" i="0">
                 <a:solidFill>
@@ -10539,7 +10542,7 @@
                 <a:effectLst/>
                 <a:latin typeface="pplxSerif"/>
               </a:rPr>
-              <a:t>actividades correspondientes</a:t>
+              <a:t>https://github.com/eddiCastS/ABD</a:t>
             </a:r>
           </a:p>
           <a:p>
@@ -10608,7 +10611,7 @@
     <mc:Choice Requires="p159">
       <p:transition/>
     </mc:Choice>
-    <mc:Fallback xmlns="" xmlns:m="http://schemas.openxmlformats.org/officeDocument/2006/math" xmlns:w="http://schemas.openxmlformats.org/wordprocessingml/2006/main">
+    <mc:Fallback xmlns:w="http://schemas.openxmlformats.org/wordprocessingml/2006/main" xmlns:m="http://schemas.openxmlformats.org/officeDocument/2006/math" xmlns="">
       <p:transition advClick="1"/>
     </mc:Fallback>
   </mc:AlternateContent>
@@ -12321,7 +12324,7 @@
     <mc:Choice Requires="p159">
       <p:transition/>
     </mc:Choice>
-    <mc:Fallback xmlns:w="http://schemas.openxmlformats.org/wordprocessingml/2006/main" xmlns:m="http://schemas.openxmlformats.org/officeDocument/2006/math" xmlns="">
+    <mc:Fallback xmlns="" xmlns:m="http://schemas.openxmlformats.org/officeDocument/2006/math" xmlns:w="http://schemas.openxmlformats.org/wordprocessingml/2006/main">
       <p:transition advClick="1"/>
     </mc:Fallback>
   </mc:AlternateContent>
@@ -14294,7 +14297,7 @@
     <mc:Choice Requires="p159">
       <p:transition/>
     </mc:Choice>
-    <mc:Fallback xmlns:w="http://schemas.openxmlformats.org/wordprocessingml/2006/main" xmlns:m="http://schemas.openxmlformats.org/officeDocument/2006/math" xmlns="">
+    <mc:Fallback xmlns="" xmlns:m="http://schemas.openxmlformats.org/officeDocument/2006/math" xmlns:w="http://schemas.openxmlformats.org/wordprocessingml/2006/main">
       <p:transition advClick="1"/>
     </mc:Fallback>
   </mc:AlternateContent>
@@ -14613,7 +14616,7 @@
     <mc:Choice Requires="p159">
       <p:transition/>
     </mc:Choice>
-    <mc:Fallback xmlns:w="http://schemas.openxmlformats.org/wordprocessingml/2006/main" xmlns:m="http://schemas.openxmlformats.org/officeDocument/2006/math" xmlns="">
+    <mc:Fallback xmlns="" xmlns:m="http://schemas.openxmlformats.org/officeDocument/2006/math" xmlns:w="http://schemas.openxmlformats.org/wordprocessingml/2006/main">
       <p:transition advClick="1"/>
     </mc:Fallback>
   </mc:AlternateContent>
@@ -15116,7 +15119,7 @@
     <mc:Choice Requires="p159">
       <p:transition/>
     </mc:Choice>
-    <mc:Fallback xmlns:w="http://schemas.openxmlformats.org/wordprocessingml/2006/main" xmlns:m="http://schemas.openxmlformats.org/officeDocument/2006/math" xmlns="">
+    <mc:Fallback xmlns="" xmlns:m="http://schemas.openxmlformats.org/officeDocument/2006/math" xmlns:w="http://schemas.openxmlformats.org/wordprocessingml/2006/main">
       <p:transition advClick="1"/>
     </mc:Fallback>
   </mc:AlternateContent>
